--- a/docker/03_Images.pptx
+++ b/docker/03_Images.pptx
@@ -19,8 +19,8 @@
     <p:sldId id="470" r:id="rId7"/>
     <p:sldId id="467" r:id="rId8"/>
     <p:sldId id="442" r:id="rId9"/>
-    <p:sldId id="452" r:id="rId10"/>
-    <p:sldId id="447" r:id="rId11"/>
+    <p:sldId id="447" r:id="rId10"/>
+    <p:sldId id="452" r:id="rId11"/>
     <p:sldId id="468" r:id="rId12"/>
     <p:sldId id="466" r:id="rId13"/>
     <p:sldId id="265" r:id="rId14"/>
@@ -2483,7 +2483,7 @@
             <a:fld id="{47855BD9-AF71-426C-9B9B-B0E52B88852E}" type="slidenum">
               <a:rPr lang="de-DE" sz="1000" smtClean="0"/>
               <a:pPr algn="ctr"/>
-              <a:t>‹#›</a:t>
+              <a:t>‹Nr.›</a:t>
             </a:fld>
             <a:endParaRPr lang="de-DE" sz="1000" dirty="0"/>
           </a:p>
@@ -2632,7 +2632,7 @@
             <a:fld id="{7D8C2C35-2B8A-446E-BEC0-FD36716C29AC}" type="slidenum">
               <a:rPr lang="de-DE" smtClean="0"/>
               <a:pPr/>
-              <a:t>‹#›</a:t>
+              <a:t>‹Nr.›</a:t>
             </a:fld>
             <a:endParaRPr lang="de-DE" dirty="0"/>
           </a:p>
@@ -2888,29 +2888,33 @@
           <a:lstStyle/>
           <a:p>
             <a:r>
-              <a:rPr lang="en-US" dirty="0"/>
-              <a:t>The docker hub offers (provides storage and the push/pull protocol for) docker images. </a:t>
-            </a:r>
-          </a:p>
-          <a:p>
-            <a:r>
-              <a:rPr lang="en-US" dirty="0"/>
-              <a:t>Each docker image has a clearly specified version. There can be multiple version tags. </a:t>
-            </a:r>
-          </a:p>
-          <a:p>
-            <a:r>
-              <a:rPr lang="en-US" dirty="0"/>
-              <a:t>The 'Dockerfile' defines the automated build instructions and show what is in the image. (see Dockerfile chapter). Dockerfiles are also included in images and document the contents.</a:t>
-            </a:r>
-          </a:p>
-          <a:p>
-            <a:endParaRPr lang="en-US" dirty="0"/>
-          </a:p>
-          <a:p>
-            <a:r>
-              <a:rPr lang="en-US" dirty="0"/>
-              <a:t>At SAP, Artifactory is the preferred solution to host and distribute your Docker images.</a:t>
+              <a:rPr lang="en-US" baseline="0" dirty="0"/>
+              <a:t>Some, if not most registries require to log in to push or even to pull images.</a:t>
+            </a:r>
+          </a:p>
+          <a:p>
+            <a:endParaRPr lang="en-US" baseline="0" dirty="0"/>
+          </a:p>
+          <a:p>
+            <a:r>
+              <a:rPr lang="en-US" baseline="0" dirty="0"/>
+              <a:t>With 'docker login', one can submit the username and password for a given registry (specified by its URL). Docker will persist these login credentials in a </a:t>
+            </a:r>
+            <a:r>
+              <a:rPr lang="en-US" baseline="0" dirty="0" err="1"/>
+              <a:t>config.json</a:t>
+            </a:r>
+            <a:r>
+              <a:rPr lang="en-US" baseline="0" dirty="0"/>
+              <a:t> (usually found in ~/docker/</a:t>
+            </a:r>
+            <a:r>
+              <a:rPr lang="en-US" baseline="0" dirty="0" err="1"/>
+              <a:t>config.json</a:t>
+            </a:r>
+            <a:r>
+              <a:rPr lang="en-US" baseline="0" dirty="0"/>
+              <a:t>) and use them every time a registry is accessed.</a:t>
             </a:r>
           </a:p>
         </p:txBody>
@@ -2931,18 +2935,18 @@
           <a:lstStyle/>
           <a:p>
             <a:fld id="{7D8C2C35-2B8A-446E-BEC0-FD36716C29AC}" type="slidenum">
-              <a:rPr lang="en-US" smtClean="0"/>
+              <a:rPr lang="de-DE" smtClean="0"/>
               <a:pPr/>
               <a:t>10</a:t>
             </a:fld>
-            <a:endParaRPr lang="en-US" dirty="0"/>
+            <a:endParaRPr lang="de-DE" dirty="0"/>
           </a:p>
         </p:txBody>
       </p:sp>
     </p:spTree>
     <p:extLst>
       <p:ext uri="{BB962C8B-B14F-4D97-AF65-F5344CB8AC3E}">
-        <p14:creationId xmlns:p14="http://schemas.microsoft.com/office/powerpoint/2010/main" val="2563895036"/>
+        <p14:creationId xmlns:p14="http://schemas.microsoft.com/office/powerpoint/2010/main" val="4009320709"/>
       </p:ext>
     </p:extLst>
   </p:cSld>
@@ -4691,33 +4695,29 @@
           <a:lstStyle/>
           <a:p>
             <a:r>
-              <a:rPr lang="en-US" baseline="0" dirty="0"/>
-              <a:t>Some, if not most registries require to log in to push or even to pull images.</a:t>
-            </a:r>
-          </a:p>
-          <a:p>
-            <a:endParaRPr lang="en-US" baseline="0" dirty="0"/>
-          </a:p>
-          <a:p>
-            <a:r>
-              <a:rPr lang="en-US" baseline="0" dirty="0"/>
-              <a:t>With 'docker login', one can submit the username and password for a given registry (specified by its URL). Docker will persist these login credentials in a </a:t>
-            </a:r>
-            <a:r>
-              <a:rPr lang="en-US" baseline="0" dirty="0" err="1"/>
-              <a:t>config.json</a:t>
-            </a:r>
-            <a:r>
-              <a:rPr lang="en-US" baseline="0" dirty="0"/>
-              <a:t> (usually found in ~/docker/</a:t>
-            </a:r>
-            <a:r>
-              <a:rPr lang="en-US" baseline="0" dirty="0" err="1"/>
-              <a:t>config.json</a:t>
-            </a:r>
-            <a:r>
-              <a:rPr lang="en-US" baseline="0" dirty="0"/>
-              <a:t>) and use them every time a registry is accessed.</a:t>
+              <a:rPr lang="en-US" dirty="0"/>
+              <a:t>The docker hub offers (provides storage and the push/pull protocol for) docker images. </a:t>
+            </a:r>
+          </a:p>
+          <a:p>
+            <a:r>
+              <a:rPr lang="en-US" dirty="0"/>
+              <a:t>Each docker image has a clearly specified version. There can be multiple version tags. </a:t>
+            </a:r>
+          </a:p>
+          <a:p>
+            <a:r>
+              <a:rPr lang="en-US" dirty="0"/>
+              <a:t>The 'Dockerfile' defines the automated build instructions and show what is in the image. (see Dockerfile chapter). Dockerfiles are also included in images and document the contents.</a:t>
+            </a:r>
+          </a:p>
+          <a:p>
+            <a:endParaRPr lang="en-US" dirty="0"/>
+          </a:p>
+          <a:p>
+            <a:r>
+              <a:rPr lang="en-US" dirty="0"/>
+              <a:t>At SAP, Artifactory is the preferred solution to host and distribute your Docker images.</a:t>
             </a:r>
           </a:p>
         </p:txBody>
@@ -4738,18 +4738,18 @@
           <a:lstStyle/>
           <a:p>
             <a:fld id="{7D8C2C35-2B8A-446E-BEC0-FD36716C29AC}" type="slidenum">
-              <a:rPr lang="de-DE" smtClean="0"/>
+              <a:rPr lang="en-US" smtClean="0"/>
               <a:pPr/>
               <a:t>9</a:t>
             </a:fld>
-            <a:endParaRPr lang="de-DE" dirty="0"/>
+            <a:endParaRPr lang="en-US" dirty="0"/>
           </a:p>
         </p:txBody>
       </p:sp>
     </p:spTree>
     <p:extLst>
       <p:ext uri="{BB962C8B-B14F-4D97-AF65-F5344CB8AC3E}">
-        <p14:creationId xmlns:p14="http://schemas.microsoft.com/office/powerpoint/2010/main" val="4009320709"/>
+        <p14:creationId xmlns:p14="http://schemas.microsoft.com/office/powerpoint/2010/main" val="2563895036"/>
       </p:ext>
     </p:extLst>
   </p:cSld>
@@ -17286,7 +17286,7 @@
               <a:pPr marL="0" lvl="0" indent="0" algn="r">
                 <a:buNone/>
               </a:pPr>
-              <a:t>‹#›</a:t>
+              <a:t>‹Nr.›</a:t>
             </a:fld>
             <a:endParaRPr lang="en-US" sz="900" noProof="0" dirty="0"/>
           </a:p>
@@ -18189,78 +18189,7 @@
       </p:grpSpPr>
       <p:sp>
         <p:nvSpPr>
-          <p:cNvPr id="2" name="Text Placeholder 1">
-            <a:extLst>
-              <a:ext uri="{FF2B5EF4-FFF2-40B4-BE49-F238E27FC236}">
-                <a16:creationId xmlns:a16="http://schemas.microsoft.com/office/drawing/2014/main" id="{A704EC08-AFC7-4D18-AC9A-F3343F45EF2A}"/>
-              </a:ext>
-            </a:extLst>
-          </p:cNvPr>
-          <p:cNvSpPr>
-            <a:spLocks noGrp="1"/>
-          </p:cNvSpPr>
-          <p:nvPr>
-            <p:ph type="body" sz="quarter" idx="10"/>
-          </p:nvPr>
-        </p:nvSpPr>
-        <p:spPr/>
-        <p:txBody>
-          <a:bodyPr/>
-          <a:lstStyle/>
-          <a:p>
-            <a:r>
-              <a:rPr lang="en-US" dirty="0">
-                <a:hlinkClick r:id="rId3"/>
-              </a:rPr>
-              <a:t>Docker Hub</a:t>
-            </a:r>
-            <a:endParaRPr lang="en-US" dirty="0"/>
-          </a:p>
-          <a:p>
-            <a:endParaRPr lang="en-US" dirty="0"/>
-          </a:p>
-        </p:txBody>
-      </p:sp>
-      <p:sp>
-        <p:nvSpPr>
-          <p:cNvPr id="3" name="Text Placeholder 2">
-            <a:extLst>
-              <a:ext uri="{FF2B5EF4-FFF2-40B4-BE49-F238E27FC236}">
-                <a16:creationId xmlns:a16="http://schemas.microsoft.com/office/drawing/2014/main" id="{166921B3-EF71-4E02-AB72-2F9FB0E76D4B}"/>
-              </a:ext>
-            </a:extLst>
-          </p:cNvPr>
-          <p:cNvSpPr>
-            <a:spLocks noGrp="1"/>
-          </p:cNvSpPr>
-          <p:nvPr>
-            <p:ph type="body" sz="quarter" idx="11"/>
-          </p:nvPr>
-        </p:nvSpPr>
-        <p:spPr/>
-        <p:txBody>
-          <a:bodyPr/>
-          <a:lstStyle/>
-          <a:p>
-            <a:r>
-              <a:rPr lang="en-US" dirty="0">
-                <a:hlinkClick r:id="rId4"/>
-              </a:rPr>
-              <a:t>JFrog Artifactory</a:t>
-            </a:r>
-            <a:endParaRPr lang="en-US" dirty="0"/>
-          </a:p>
-        </p:txBody>
-      </p:sp>
-      <p:sp>
-        <p:nvSpPr>
-          <p:cNvPr id="4" name="Title 3">
-            <a:extLst>
-              <a:ext uri="{FF2B5EF4-FFF2-40B4-BE49-F238E27FC236}">
-                <a16:creationId xmlns:a16="http://schemas.microsoft.com/office/drawing/2014/main" id="{A84BDB2E-39DF-4756-92FA-1F28834FBDBB}"/>
-              </a:ext>
-            </a:extLst>
-          </p:cNvPr>
+          <p:cNvPr id="3" name="Title 2"/>
           <p:cNvSpPr>
             <a:spLocks noGrp="1"/>
           </p:cNvSpPr>
@@ -18275,17 +18204,351 @@
           <a:p>
             <a:r>
               <a:rPr lang="en-US" dirty="0"/>
-              <a:t>Registries for images</a:t>
-            </a:r>
+              <a:t>Docker login credentials</a:t>
+            </a:r>
+          </a:p>
+        </p:txBody>
+      </p:sp>
+      <p:sp>
+        <p:nvSpPr>
+          <p:cNvPr id="4" name="Flowchart: Magnetic Disk 3"/>
+          <p:cNvSpPr/>
+          <p:nvPr/>
+        </p:nvSpPr>
+        <p:spPr bwMode="gray">
+          <a:xfrm>
+            <a:off x="772758" y="1927317"/>
+            <a:ext cx="2661557" cy="1665515"/>
+          </a:xfrm>
+          <a:prstGeom prst="flowChartMagneticDisk">
+            <a:avLst/>
+          </a:prstGeom>
+          <a:solidFill>
+            <a:schemeClr val="accent1"/>
+          </a:solidFill>
+          <a:ln w="6350" algn="ctr">
+            <a:solidFill>
+              <a:schemeClr val="accent1">
+                <a:lumMod val="20000"/>
+                <a:lumOff val="80000"/>
+              </a:schemeClr>
+            </a:solidFill>
+            <a:miter lim="800000"/>
+            <a:headEnd/>
+            <a:tailEnd/>
+          </a:ln>
+        </p:spPr>
+        <p:txBody>
+          <a:bodyPr lIns="90000" tIns="72000" rIns="90000" bIns="72000" rtlCol="0" anchor="ctr"/>
+          <a:lstStyle/>
+          <a:p>
+            <a:pPr marR="0" algn="ctr" defTabSz="914400" eaLnBrk="1" fontAlgn="base" latinLnBrk="0" hangingPunct="1">
+              <a:lnSpc>
+                <a:spcPct val="100000"/>
+              </a:lnSpc>
+              <a:spcBef>
+                <a:spcPct val="50000"/>
+              </a:spcBef>
+              <a:spcAft>
+                <a:spcPct val="0"/>
+              </a:spcAft>
+              <a:buClr>
+                <a:srgbClr val="F0AB00"/>
+              </a:buClr>
+              <a:buSzPct val="80000"/>
+              <a:tabLst/>
+            </a:pPr>
+            <a:r>
+              <a:rPr kumimoji="0" lang="en-US" sz="2000" b="1" i="0" u="none" strike="noStrike" kern="0" cap="none" spc="0" normalizeH="0" baseline="0" noProof="0" dirty="0">
+                <a:ln>
+                  <a:noFill/>
+                </a:ln>
+                <a:effectLst/>
+                <a:uLnTx/>
+                <a:uFillTx/>
+                <a:ea typeface="Arial Unicode MS" pitchFamily="34" charset="-128"/>
+                <a:cs typeface="Arial Unicode MS" pitchFamily="34" charset="-128"/>
+              </a:rPr>
+              <a:t>Private Registry</a:t>
+            </a:r>
+          </a:p>
+        </p:txBody>
+      </p:sp>
+      <p:cxnSp>
+        <p:nvCxnSpPr>
+          <p:cNvPr id="16" name="Straight Arrow Connector 15"/>
+          <p:cNvCxnSpPr>
+            <a:cxnSpLocks/>
+            <a:endCxn id="36" idx="1"/>
+          </p:cNvCxnSpPr>
+          <p:nvPr/>
+        </p:nvCxnSpPr>
+        <p:spPr>
+          <a:xfrm>
+            <a:off x="3434315" y="2760076"/>
+            <a:ext cx="1903746" cy="22339"/>
+          </a:xfrm>
+          <a:prstGeom prst="straightConnector1">
+            <a:avLst/>
+          </a:prstGeom>
+          <a:ln w="57150">
+            <a:solidFill>
+              <a:schemeClr val="accent1"/>
+            </a:solidFill>
+            <a:headEnd type="triangle" w="med" len="med"/>
+            <a:tailEnd type="triangle" w="med" len="med"/>
+          </a:ln>
+        </p:spPr>
+        <p:style>
+          <a:lnRef idx="1">
+            <a:schemeClr val="accent1"/>
+          </a:lnRef>
+          <a:fillRef idx="0">
+            <a:schemeClr val="accent1"/>
+          </a:fillRef>
+          <a:effectRef idx="0">
+            <a:schemeClr val="accent1"/>
+          </a:effectRef>
+          <a:fontRef idx="minor">
+            <a:schemeClr val="tx1"/>
+          </a:fontRef>
+        </p:style>
+      </p:cxnSp>
+      <p:sp>
+        <p:nvSpPr>
+          <p:cNvPr id="34" name="Rectangle: Rounded Corners 33"/>
+          <p:cNvSpPr/>
+          <p:nvPr/>
+        </p:nvSpPr>
+        <p:spPr bwMode="gray">
+          <a:xfrm>
+            <a:off x="8244097" y="3889271"/>
+            <a:ext cx="3448304" cy="1261311"/>
+          </a:xfrm>
+          <a:prstGeom prst="roundRect">
+            <a:avLst/>
+          </a:prstGeom>
+          <a:solidFill>
+            <a:schemeClr val="bg2"/>
+          </a:solidFill>
+          <a:ln w="28575">
+            <a:prstDash val="sysDash"/>
+            <a:headEnd/>
+            <a:tailEnd/>
+          </a:ln>
+        </p:spPr>
+        <p:style>
+          <a:lnRef idx="2">
+            <a:schemeClr val="accent2"/>
+          </a:lnRef>
+          <a:fillRef idx="1">
+            <a:schemeClr val="lt1"/>
+          </a:fillRef>
+          <a:effectRef idx="0">
+            <a:schemeClr val="accent2"/>
+          </a:effectRef>
+          <a:fontRef idx="minor">
+            <a:schemeClr val="dk1"/>
+          </a:fontRef>
+        </p:style>
+        <p:txBody>
+          <a:bodyPr lIns="90000" tIns="72000" rIns="90000" bIns="72000" rtlCol="0" anchor="ctr"/>
+          <a:lstStyle/>
+          <a:p>
+            <a:pPr marR="0" defTabSz="914400" eaLnBrk="1" fontAlgn="base" latinLnBrk="0" hangingPunct="1">
+              <a:lnSpc>
+                <a:spcPct val="100000"/>
+              </a:lnSpc>
+              <a:spcBef>
+                <a:spcPct val="50000"/>
+              </a:spcBef>
+              <a:spcAft>
+                <a:spcPct val="0"/>
+              </a:spcAft>
+              <a:buClr>
+                <a:srgbClr val="F0AB00"/>
+              </a:buClr>
+              <a:buSzPct val="80000"/>
+              <a:tabLst/>
+            </a:pPr>
+            <a:r>
+              <a:rPr lang="en-US" sz="1800" kern="0" dirty="0">
+                <a:ea typeface="Arial Unicode MS" pitchFamily="34" charset="-128"/>
+                <a:cs typeface="Arial Unicode MS" pitchFamily="34" charset="-128"/>
+              </a:rPr>
+              <a:t>docker login &lt;registry </a:t>
+            </a:r>
+            <a:r>
+              <a:rPr lang="en-US" sz="1800" kern="0" dirty="0" err="1">
+                <a:ea typeface="Arial Unicode MS" pitchFamily="34" charset="-128"/>
+                <a:cs typeface="Arial Unicode MS" pitchFamily="34" charset="-128"/>
+              </a:rPr>
+              <a:t>url</a:t>
+            </a:r>
+            <a:r>
+              <a:rPr lang="en-US" sz="1800" kern="0" dirty="0">
+                <a:ea typeface="Arial Unicode MS" pitchFamily="34" charset="-128"/>
+                <a:cs typeface="Arial Unicode MS" pitchFamily="34" charset="-128"/>
+              </a:rPr>
+              <a:t>&gt; </a:t>
+            </a:r>
+          </a:p>
+          <a:p>
+            <a:pPr marR="0" defTabSz="914400" eaLnBrk="1" fontAlgn="base" latinLnBrk="0" hangingPunct="1">
+              <a:lnSpc>
+                <a:spcPct val="100000"/>
+              </a:lnSpc>
+              <a:spcBef>
+                <a:spcPts val="600"/>
+              </a:spcBef>
+              <a:spcAft>
+                <a:spcPct val="0"/>
+              </a:spcAft>
+              <a:buClr>
+                <a:srgbClr val="F0AB00"/>
+              </a:buClr>
+              <a:buSzPct val="80000"/>
+              <a:tabLst/>
+            </a:pPr>
+            <a:r>
+              <a:rPr lang="en-US" sz="1800" kern="0" dirty="0">
+                <a:ea typeface="Arial Unicode MS" pitchFamily="34" charset="-128"/>
+                <a:cs typeface="Arial Unicode MS" pitchFamily="34" charset="-128"/>
+              </a:rPr>
+              <a:t>-u &lt;username&gt;</a:t>
+            </a:r>
+          </a:p>
+          <a:p>
+            <a:pPr marR="0" defTabSz="914400" eaLnBrk="1" fontAlgn="base" latinLnBrk="0" hangingPunct="1">
+              <a:lnSpc>
+                <a:spcPct val="100000"/>
+              </a:lnSpc>
+              <a:spcBef>
+                <a:spcPts val="600"/>
+              </a:spcBef>
+              <a:spcAft>
+                <a:spcPct val="0"/>
+              </a:spcAft>
+              <a:buClr>
+                <a:srgbClr val="F0AB00"/>
+              </a:buClr>
+              <a:buSzPct val="80000"/>
+              <a:tabLst/>
+            </a:pPr>
+            <a:r>
+              <a:rPr lang="en-US" sz="1800" kern="0" dirty="0">
+                <a:ea typeface="Arial Unicode MS" pitchFamily="34" charset="-128"/>
+                <a:cs typeface="Arial Unicode MS" pitchFamily="34" charset="-128"/>
+              </a:rPr>
+              <a:t>-p &lt;password&gt;</a:t>
+            </a:r>
+            <a:endParaRPr kumimoji="0" lang="en-US" sz="1800" b="0" i="0" u="none" strike="noStrike" kern="0" cap="none" spc="0" normalizeH="0" baseline="0" noProof="0" dirty="0" err="1">
+              <a:ln>
+                <a:noFill/>
+              </a:ln>
+              <a:effectLst/>
+              <a:uLnTx/>
+              <a:uFillTx/>
+              <a:ea typeface="Arial Unicode MS" pitchFamily="34" charset="-128"/>
+              <a:cs typeface="Arial Unicode MS" pitchFamily="34" charset="-128"/>
+            </a:endParaRPr>
           </a:p>
         </p:txBody>
       </p:sp>
       <p:pic>
         <p:nvPicPr>
-          <p:cNvPr id="5" name="Picture 4">
+          <p:cNvPr id="29" name="Picture 28"/>
+          <p:cNvPicPr>
+            <a:picLocks noChangeAspect="1"/>
+          </p:cNvPicPr>
+          <p:nvPr/>
+        </p:nvPicPr>
+        <p:blipFill>
+          <a:blip r:embed="rId3"/>
+          <a:stretch>
+            <a:fillRect/>
+          </a:stretch>
+        </p:blipFill>
+        <p:spPr>
+          <a:xfrm rot="4927815" flipH="1">
+            <a:off x="10396613" y="4160567"/>
+            <a:ext cx="1378156" cy="1378156"/>
+          </a:xfrm>
+          <a:prstGeom prst="rect">
+            <a:avLst/>
+          </a:prstGeom>
+        </p:spPr>
+      </p:pic>
+      <p:sp>
+        <p:nvSpPr>
+          <p:cNvPr id="36" name="Rectangle 35"/>
+          <p:cNvSpPr/>
+          <p:nvPr/>
+        </p:nvSpPr>
+        <p:spPr bwMode="gray">
+          <a:xfrm>
+            <a:off x="5338061" y="2135830"/>
+            <a:ext cx="2414107" cy="1293169"/>
+          </a:xfrm>
+          <a:prstGeom prst="rect">
+            <a:avLst/>
+          </a:prstGeom>
+          <a:solidFill>
+            <a:schemeClr val="accent3">
+              <a:lumMod val="50000"/>
+            </a:schemeClr>
+          </a:solidFill>
+          <a:ln w="6350" algn="ctr">
+            <a:solidFill>
+              <a:schemeClr val="tx1"/>
+            </a:solidFill>
+            <a:miter lim="800000"/>
+            <a:headEnd/>
+            <a:tailEnd/>
+          </a:ln>
+        </p:spPr>
+        <p:txBody>
+          <a:bodyPr vert="horz" lIns="90000" tIns="72000" rIns="90000" bIns="72000" rtlCol="0" anchor="ctr"/>
+          <a:lstStyle/>
+          <a:p>
+            <a:pPr algn="ctr" defTabSz="914400" fontAlgn="base">
+              <a:spcBef>
+                <a:spcPct val="50000"/>
+              </a:spcBef>
+              <a:spcAft>
+                <a:spcPct val="0"/>
+              </a:spcAft>
+              <a:buClr>
+                <a:srgbClr val="F0AB00"/>
+              </a:buClr>
+              <a:buSzPct val="80000"/>
+            </a:pPr>
+            <a:r>
+              <a:rPr lang="en-US" sz="1600" kern="0">
+                <a:solidFill>
+                  <a:schemeClr val="bg1"/>
+                </a:solidFill>
+                <a:latin typeface="Arial"/>
+                <a:ea typeface="Arial Unicode MS" pitchFamily="34" charset="-128"/>
+              </a:rPr>
+              <a:t>dockerd</a:t>
+            </a:r>
+            <a:endParaRPr lang="en-US" sz="1600" kern="0" dirty="0">
+              <a:solidFill>
+                <a:schemeClr val="bg1"/>
+              </a:solidFill>
+              <a:latin typeface="Arial"/>
+              <a:ea typeface="Arial Unicode MS" pitchFamily="34" charset="-128"/>
+            </a:endParaRPr>
+          </a:p>
+        </p:txBody>
+      </p:sp>
+      <p:pic>
+        <p:nvPicPr>
+          <p:cNvPr id="11" name="Picture 10">
             <a:extLst>
               <a:ext uri="{FF2B5EF4-FFF2-40B4-BE49-F238E27FC236}">
-                <a16:creationId xmlns:a16="http://schemas.microsoft.com/office/drawing/2014/main" id="{D9249236-3754-4D21-806B-FDC6E2E942BD}"/>
+                <a16:creationId xmlns:a16="http://schemas.microsoft.com/office/drawing/2014/main" id="{8687B53D-D62B-41B5-9DDD-8963C6188C03}"/>
               </a:ext>
             </a:extLst>
           </p:cNvPr>
@@ -18295,27 +18558,144 @@
           <p:nvPr/>
         </p:nvPicPr>
         <p:blipFill>
-          <a:blip r:embed="rId5"/>
+          <a:blip r:embed="rId4"/>
           <a:stretch>
             <a:fillRect/>
           </a:stretch>
         </p:blipFill>
         <p:spPr>
           <a:xfrm>
-            <a:off x="708640" y="2217755"/>
-            <a:ext cx="4586374" cy="3277367"/>
+            <a:off x="3136565" y="2705828"/>
+            <a:ext cx="1774008" cy="1774008"/>
           </a:xfrm>
           <a:prstGeom prst="rect">
             <a:avLst/>
           </a:prstGeom>
         </p:spPr>
       </p:pic>
+      <p:sp>
+        <p:nvSpPr>
+          <p:cNvPr id="2" name="Rectangle 1">
+            <a:extLst>
+              <a:ext uri="{FF2B5EF4-FFF2-40B4-BE49-F238E27FC236}">
+                <a16:creationId xmlns:a16="http://schemas.microsoft.com/office/drawing/2014/main" id="{25F2868B-D6D2-4C76-B481-6486923ADA06}"/>
+              </a:ext>
+            </a:extLst>
+          </p:cNvPr>
+          <p:cNvSpPr/>
+          <p:nvPr/>
+        </p:nvSpPr>
+        <p:spPr bwMode="gray">
+          <a:xfrm>
+            <a:off x="907136" y="4406148"/>
+            <a:ext cx="2392799" cy="886995"/>
+          </a:xfrm>
+          <a:prstGeom prst="rect">
+            <a:avLst/>
+          </a:prstGeom>
+          <a:solidFill>
+            <a:schemeClr val="accent1"/>
+          </a:solidFill>
+          <a:ln w="6350" algn="ctr">
+            <a:solidFill>
+              <a:schemeClr val="accent1">
+                <a:lumMod val="20000"/>
+                <a:lumOff val="80000"/>
+              </a:schemeClr>
+            </a:solidFill>
+            <a:miter lim="800000"/>
+            <a:headEnd/>
+            <a:tailEnd/>
+          </a:ln>
+        </p:spPr>
+        <p:txBody>
+          <a:bodyPr lIns="90000" tIns="72000" rIns="90000" bIns="72000" rtlCol="0" anchor="ctr"/>
+          <a:lstStyle/>
+          <a:p>
+            <a:pPr marR="0" algn="ctr" defTabSz="914400" eaLnBrk="1" fontAlgn="base" latinLnBrk="0" hangingPunct="1">
+              <a:lnSpc>
+                <a:spcPct val="100000"/>
+              </a:lnSpc>
+              <a:spcBef>
+                <a:spcPct val="50000"/>
+              </a:spcBef>
+              <a:spcAft>
+                <a:spcPct val="0"/>
+              </a:spcAft>
+              <a:buClr>
+                <a:srgbClr val="F0AB00"/>
+              </a:buClr>
+              <a:buSzPct val="80000"/>
+              <a:tabLst/>
+            </a:pPr>
+            <a:r>
+              <a:rPr kumimoji="0" lang="en-US" sz="1800" b="0" i="0" u="none" strike="noStrike" kern="0" cap="none" spc="0" normalizeH="0" baseline="0" noProof="0" dirty="0">
+                <a:ln>
+                  <a:noFill/>
+                </a:ln>
+                <a:effectLst/>
+                <a:uLnTx/>
+                <a:uFillTx/>
+                <a:ea typeface="Arial Unicode MS" pitchFamily="34" charset="-128"/>
+                <a:cs typeface="Arial Unicode MS" pitchFamily="34" charset="-128"/>
+              </a:rPr>
+              <a:t>User Management</a:t>
+            </a:r>
+          </a:p>
+        </p:txBody>
+      </p:sp>
+      <p:cxnSp>
+        <p:nvCxnSpPr>
+          <p:cNvPr id="6" name="Connector: Elbow 5">
+            <a:extLst>
+              <a:ext uri="{FF2B5EF4-FFF2-40B4-BE49-F238E27FC236}">
+                <a16:creationId xmlns:a16="http://schemas.microsoft.com/office/drawing/2014/main" id="{288D0C73-804E-414D-BC04-D6E95E9221F5}"/>
+              </a:ext>
+            </a:extLst>
+          </p:cNvPr>
+          <p:cNvCxnSpPr>
+            <a:stCxn id="2" idx="3"/>
+            <a:endCxn id="11" idx="2"/>
+          </p:cNvCxnSpPr>
+          <p:nvPr/>
+        </p:nvCxnSpPr>
+        <p:spPr>
+          <a:xfrm flipV="1">
+            <a:off x="3299935" y="4479836"/>
+            <a:ext cx="723634" cy="369810"/>
+          </a:xfrm>
+          <a:prstGeom prst="bentConnector2">
+            <a:avLst/>
+          </a:prstGeom>
+          <a:ln w="57150">
+            <a:solidFill>
+              <a:schemeClr val="accent1"/>
+            </a:solidFill>
+            <a:headEnd type="none" w="med" len="med"/>
+            <a:tailEnd type="triangle" w="med" len="med"/>
+          </a:ln>
+        </p:spPr>
+        <p:style>
+          <a:lnRef idx="1">
+            <a:schemeClr val="accent1"/>
+          </a:lnRef>
+          <a:fillRef idx="0">
+            <a:schemeClr val="accent1"/>
+          </a:fillRef>
+          <a:effectRef idx="0">
+            <a:schemeClr val="accent1"/>
+          </a:effectRef>
+          <a:fontRef idx="minor">
+            <a:schemeClr val="tx1"/>
+          </a:fontRef>
+        </p:style>
+      </p:cxnSp>
       <p:pic>
         <p:nvPicPr>
-          <p:cNvPr id="6" name="Picture 5">
+          <p:cNvPr id="10" name="Graphic 9" descr="Document">
             <a:extLst>
               <a:ext uri="{FF2B5EF4-FFF2-40B4-BE49-F238E27FC236}">
-                <a16:creationId xmlns:a16="http://schemas.microsoft.com/office/drawing/2014/main" id="{3F11DC76-4D9B-46B1-988C-6FA608C8F257}"/>
+                <a16:creationId xmlns:a16="http://schemas.microsoft.com/office/drawing/2014/main" id="{6186E8BD-E751-4DAD-9E48-80FF3D8B0E39}"/>
               </a:ext>
             </a:extLst>
           </p:cNvPr>
@@ -18325,25 +18705,242 @@
           <p:nvPr/>
         </p:nvPicPr>
         <p:blipFill>
-          <a:blip r:embed="rId6"/>
+          <a:blip r:embed="rId5">
+            <a:extLst>
+              <a:ext uri="{96DAC541-7B7A-43D3-8B79-37D633B846F1}">
+                <asvg:svgBlip xmlns:asvg="http://schemas.microsoft.com/office/drawing/2016/SVG/main" r:embed="rId6"/>
+              </a:ext>
+            </a:extLst>
+          </a:blip>
           <a:stretch>
             <a:fillRect/>
           </a:stretch>
         </p:blipFill>
         <p:spPr>
           <a:xfrm>
-            <a:off x="6430795" y="2218854"/>
-            <a:ext cx="5259682" cy="3276268"/>
+            <a:off x="5666796" y="4077990"/>
+            <a:ext cx="914400" cy="914400"/>
           </a:xfrm>
           <a:prstGeom prst="rect">
             <a:avLst/>
           </a:prstGeom>
         </p:spPr>
       </p:pic>
+      <p:sp>
+        <p:nvSpPr>
+          <p:cNvPr id="12" name="TextBox 11">
+            <a:extLst>
+              <a:ext uri="{FF2B5EF4-FFF2-40B4-BE49-F238E27FC236}">
+                <a16:creationId xmlns:a16="http://schemas.microsoft.com/office/drawing/2014/main" id="{CDAF12C8-7ECC-46AC-A508-C52FC8A5C963}"/>
+              </a:ext>
+            </a:extLst>
+          </p:cNvPr>
+          <p:cNvSpPr txBox="1"/>
+          <p:nvPr/>
+        </p:nvSpPr>
+        <p:spPr>
+          <a:xfrm>
+            <a:off x="5471556" y="4992390"/>
+            <a:ext cx="1304880" cy="276999"/>
+          </a:xfrm>
+          <a:prstGeom prst="rect">
+            <a:avLst/>
+          </a:prstGeom>
+          <a:noFill/>
+        </p:spPr>
+        <p:txBody>
+          <a:bodyPr wrap="square" lIns="0" tIns="0" rIns="0" bIns="0" rtlCol="0">
+            <a:spAutoFit/>
+          </a:bodyPr>
+          <a:lstStyle/>
+          <a:p>
+            <a:pPr algn="ctr" fontAlgn="base">
+              <a:spcBef>
+                <a:spcPct val="50000"/>
+              </a:spcBef>
+              <a:spcAft>
+                <a:spcPct val="0"/>
+              </a:spcAft>
+              <a:buClr>
+                <a:srgbClr val="F0AB00"/>
+              </a:buClr>
+              <a:buSzPct val="80000"/>
+            </a:pPr>
+            <a:r>
+              <a:rPr lang="en-US" sz="1800" kern="0" dirty="0" err="1">
+                <a:solidFill>
+                  <a:schemeClr val="accent6">
+                    <a:lumMod val="50000"/>
+                  </a:schemeClr>
+                </a:solidFill>
+                <a:ea typeface="Arial Unicode MS" pitchFamily="34" charset="-128"/>
+                <a:cs typeface="Arial Unicode MS" pitchFamily="34" charset="-128"/>
+              </a:rPr>
+              <a:t>config.json</a:t>
+            </a:r>
+            <a:endParaRPr lang="en-US" sz="1800" kern="0" dirty="0">
+              <a:solidFill>
+                <a:schemeClr val="accent6">
+                  <a:lumMod val="50000"/>
+                </a:schemeClr>
+              </a:solidFill>
+              <a:ea typeface="Arial Unicode MS" pitchFamily="34" charset="-128"/>
+              <a:cs typeface="Arial Unicode MS" pitchFamily="34" charset="-128"/>
+            </a:endParaRPr>
+          </a:p>
+        </p:txBody>
+      </p:sp>
+      <p:cxnSp>
+        <p:nvCxnSpPr>
+          <p:cNvPr id="19" name="Straight Arrow Connector 18">
+            <a:extLst>
+              <a:ext uri="{FF2B5EF4-FFF2-40B4-BE49-F238E27FC236}">
+                <a16:creationId xmlns:a16="http://schemas.microsoft.com/office/drawing/2014/main" id="{13F24729-9B15-43FE-A91E-794CF2F681AE}"/>
+              </a:ext>
+            </a:extLst>
+          </p:cNvPr>
+          <p:cNvCxnSpPr>
+            <a:cxnSpLocks/>
+            <a:stCxn id="10" idx="0"/>
+          </p:cNvCxnSpPr>
+          <p:nvPr/>
+        </p:nvCxnSpPr>
+        <p:spPr>
+          <a:xfrm flipV="1">
+            <a:off x="6123996" y="3429000"/>
+            <a:ext cx="0" cy="648990"/>
+          </a:xfrm>
+          <a:prstGeom prst="straightConnector1">
+            <a:avLst/>
+          </a:prstGeom>
+          <a:ln w="57150">
+            <a:solidFill>
+              <a:schemeClr val="accent6">
+                <a:lumMod val="50000"/>
+              </a:schemeClr>
+            </a:solidFill>
+            <a:headEnd type="none" w="med" len="med"/>
+            <a:tailEnd type="triangle" w="med" len="med"/>
+          </a:ln>
+        </p:spPr>
+        <p:style>
+          <a:lnRef idx="1">
+            <a:schemeClr val="accent1"/>
+          </a:lnRef>
+          <a:fillRef idx="0">
+            <a:schemeClr val="accent1"/>
+          </a:fillRef>
+          <a:effectRef idx="0">
+            <a:schemeClr val="accent1"/>
+          </a:effectRef>
+          <a:fontRef idx="minor">
+            <a:schemeClr val="tx1"/>
+          </a:fontRef>
+        </p:style>
+      </p:cxnSp>
+      <p:pic>
+        <p:nvPicPr>
+          <p:cNvPr id="22" name="Graphic 21" descr="Laptop">
+            <a:extLst>
+              <a:ext uri="{FF2B5EF4-FFF2-40B4-BE49-F238E27FC236}">
+                <a16:creationId xmlns:a16="http://schemas.microsoft.com/office/drawing/2014/main" id="{4706E33B-D950-4CFE-AED0-70E8D0ADABC7}"/>
+              </a:ext>
+            </a:extLst>
+          </p:cNvPr>
+          <p:cNvPicPr>
+            <a:picLocks noChangeAspect="1"/>
+          </p:cNvPicPr>
+          <p:nvPr/>
+        </p:nvPicPr>
+        <p:blipFill>
+          <a:blip r:embed="rId7">
+            <a:extLst>
+              <a:ext uri="{96DAC541-7B7A-43D3-8B79-37D633B846F1}">
+                <asvg:svgBlip xmlns:asvg="http://schemas.microsoft.com/office/drawing/2016/SVG/main" r:embed="rId8"/>
+              </a:ext>
+            </a:extLst>
+          </a:blip>
+          <a:stretch>
+            <a:fillRect/>
+          </a:stretch>
+        </p:blipFill>
+        <p:spPr>
+          <a:xfrm>
+            <a:off x="9219829" y="2535845"/>
+            <a:ext cx="1542145" cy="1542145"/>
+          </a:xfrm>
+          <a:prstGeom prst="rect">
+            <a:avLst/>
+          </a:prstGeom>
+        </p:spPr>
+      </p:pic>
+      <p:sp>
+        <p:nvSpPr>
+          <p:cNvPr id="23" name="Arrow: Chevron 22">
+            <a:extLst>
+              <a:ext uri="{FF2B5EF4-FFF2-40B4-BE49-F238E27FC236}">
+                <a16:creationId xmlns:a16="http://schemas.microsoft.com/office/drawing/2014/main" id="{21A6C290-3016-47F6-A96A-336589ACAF5F}"/>
+              </a:ext>
+            </a:extLst>
+          </p:cNvPr>
+          <p:cNvSpPr/>
+          <p:nvPr/>
+        </p:nvSpPr>
+        <p:spPr bwMode="gray">
+          <a:xfrm rot="10800000">
+            <a:off x="6776436" y="4313441"/>
+            <a:ext cx="1242096" cy="443498"/>
+          </a:xfrm>
+          <a:prstGeom prst="chevron">
+            <a:avLst/>
+          </a:prstGeom>
+          <a:solidFill>
+            <a:schemeClr val="tx1"/>
+          </a:solidFill>
+          <a:ln w="6350" algn="ctr">
+            <a:noFill/>
+            <a:miter lim="800000"/>
+            <a:headEnd/>
+            <a:tailEnd/>
+          </a:ln>
+        </p:spPr>
+        <p:txBody>
+          <a:bodyPr lIns="90000" tIns="72000" rIns="90000" bIns="72000" rtlCol="0" anchor="ctr"/>
+          <a:lstStyle/>
+          <a:p>
+            <a:pPr marR="0" algn="ctr" defTabSz="914400" eaLnBrk="1" fontAlgn="base" latinLnBrk="0" hangingPunct="1">
+              <a:lnSpc>
+                <a:spcPct val="100000"/>
+              </a:lnSpc>
+              <a:spcBef>
+                <a:spcPct val="50000"/>
+              </a:spcBef>
+              <a:spcAft>
+                <a:spcPct val="0"/>
+              </a:spcAft>
+              <a:buClr>
+                <a:srgbClr val="F0AB00"/>
+              </a:buClr>
+              <a:buSzPct val="80000"/>
+              <a:tabLst/>
+            </a:pPr>
+            <a:endParaRPr kumimoji="0" lang="en-US" sz="1800" b="0" i="0" u="none" strike="noStrike" kern="0" cap="none" spc="0" normalizeH="0" baseline="0" noProof="0" dirty="0" err="1">
+              <a:ln>
+                <a:noFill/>
+              </a:ln>
+              <a:effectLst/>
+              <a:uLnTx/>
+              <a:uFillTx/>
+              <a:ea typeface="Arial Unicode MS" pitchFamily="34" charset="-128"/>
+              <a:cs typeface="Arial Unicode MS" pitchFamily="34" charset="-128"/>
+            </a:endParaRPr>
+          </a:p>
+        </p:txBody>
+      </p:sp>
     </p:spTree>
     <p:extLst>
       <p:ext uri="{BB962C8B-B14F-4D97-AF65-F5344CB8AC3E}">
-        <p14:creationId xmlns:p14="http://schemas.microsoft.com/office/powerpoint/2010/main" val="2436238159"/>
+        <p14:creationId xmlns:p14="http://schemas.microsoft.com/office/powerpoint/2010/main" val="4129837522"/>
       </p:ext>
     </p:extLst>
   </p:cSld>
@@ -19449,10 +20046,10 @@
         </p:nvGrpSpPr>
         <p:grpSpPr>
           <a:xfrm>
-            <a:off x="4841966" y="1615987"/>
-            <a:ext cx="5947954" cy="3896539"/>
-            <a:chOff x="4693920" y="1694364"/>
-            <a:chExt cx="5947954" cy="3896539"/>
+            <a:off x="4850432" y="2003943"/>
+            <a:ext cx="5947954" cy="3243880"/>
+            <a:chOff x="4693920" y="1694365"/>
+            <a:chExt cx="5947954" cy="3243880"/>
           </a:xfrm>
         </p:grpSpPr>
         <p:sp>
@@ -19469,8 +20066,8 @@
           </p:nvSpPr>
           <p:spPr bwMode="gray">
             <a:xfrm>
-              <a:off x="4693920" y="1694364"/>
-              <a:ext cx="5947954" cy="3896539"/>
+              <a:off x="4693920" y="1694365"/>
+              <a:ext cx="5947954" cy="3243880"/>
             </a:xfrm>
             <a:prstGeom prst="rect">
               <a:avLst/>
@@ -19556,7 +20153,7 @@
           <p:spPr bwMode="gray">
             <a:xfrm>
               <a:off x="4920343" y="2718929"/>
-              <a:ext cx="5495108" cy="2645551"/>
+              <a:ext cx="5495108" cy="2075381"/>
             </a:xfrm>
             <a:prstGeom prst="rect">
               <a:avLst/>
@@ -19636,7 +20233,7 @@
           </p:nvSpPr>
           <p:spPr bwMode="gray">
             <a:xfrm>
-              <a:off x="5329646" y="4730608"/>
+              <a:off x="5329646" y="4103591"/>
               <a:ext cx="4972594" cy="496389"/>
             </a:xfrm>
             <a:prstGeom prst="rect">
@@ -19707,92 +20304,6 @@
                   <a:cs typeface="Arial Unicode MS" pitchFamily="34" charset="-128"/>
                 </a:rPr>
                 <a:t> (e.g. Debian)</a:t>
-              </a:r>
-              <a:endParaRPr kumimoji="0" lang="en-US" sz="1800" b="0" i="0" u="none" strike="noStrike" kern="0" cap="none" spc="0" normalizeH="0" baseline="0" dirty="0">
-                <a:ln>
-                  <a:noFill/>
-                </a:ln>
-                <a:solidFill>
-                  <a:schemeClr val="bg1"/>
-                </a:solidFill>
-                <a:effectLst/>
-                <a:uLnTx/>
-                <a:uFillTx/>
-                <a:ea typeface="Arial Unicode MS" pitchFamily="34" charset="-128"/>
-                <a:cs typeface="Arial Unicode MS" pitchFamily="34" charset="-128"/>
-              </a:endParaRPr>
-            </a:p>
-          </p:txBody>
-        </p:sp>
-        <p:sp>
-          <p:nvSpPr>
-            <p:cNvPr id="18" name="Rectangle 17">
-              <a:extLst>
-                <a:ext uri="{FF2B5EF4-FFF2-40B4-BE49-F238E27FC236}">
-                  <a16:creationId xmlns:a16="http://schemas.microsoft.com/office/drawing/2014/main" id="{9A253E9F-4801-4888-96F6-7478CB4FA707}"/>
-                </a:ext>
-              </a:extLst>
-            </p:cNvPr>
-            <p:cNvSpPr/>
-            <p:nvPr/>
-          </p:nvSpPr>
-          <p:spPr bwMode="gray">
-            <a:xfrm>
-              <a:off x="5329646" y="4103591"/>
-              <a:ext cx="4972594" cy="496389"/>
-            </a:xfrm>
-            <a:prstGeom prst="rect">
-              <a:avLst/>
-            </a:prstGeom>
-            <a:solidFill>
-              <a:schemeClr val="accent6">
-                <a:lumMod val="75000"/>
-              </a:schemeClr>
-            </a:solidFill>
-            <a:ln w="6350" algn="ctr">
-              <a:solidFill>
-                <a:schemeClr val="tx1"/>
-              </a:solidFill>
-              <a:miter lim="800000"/>
-              <a:headEnd/>
-              <a:tailEnd/>
-            </a:ln>
-          </p:spPr>
-          <p:txBody>
-            <a:bodyPr lIns="90000" tIns="72000" rIns="90000" bIns="72000" rtlCol="0" anchor="ctr"/>
-            <a:lstStyle/>
-            <a:p>
-              <a:pPr marR="0" algn="ctr" defTabSz="914400" eaLnBrk="1" fontAlgn="base" latinLnBrk="0" hangingPunct="1">
-                <a:lnSpc>
-                  <a:spcPct val="100000"/>
-                </a:lnSpc>
-                <a:spcBef>
-                  <a:spcPct val="50000"/>
-                </a:spcBef>
-                <a:spcAft>
-                  <a:spcPct val="0"/>
-                </a:spcAft>
-                <a:buClr>
-                  <a:srgbClr val="F0AB00"/>
-                </a:buClr>
-                <a:buSzPct val="80000"/>
-                <a:tabLst/>
-              </a:pPr>
-              <a:r>
-                <a:rPr kumimoji="0" lang="en-US" sz="1800" b="0" i="0" u="none" strike="noStrike" kern="0" cap="none" spc="0" normalizeH="0" baseline="0" dirty="0" err="1">
-                  <a:ln>
-                    <a:noFill/>
-                  </a:ln>
-                  <a:solidFill>
-                    <a:schemeClr val="bg1"/>
-                  </a:solidFill>
-                  <a:effectLst/>
-                  <a:uLnTx/>
-                  <a:uFillTx/>
-                  <a:ea typeface="Arial Unicode MS" pitchFamily="34" charset="-128"/>
-                  <a:cs typeface="Arial Unicode MS" pitchFamily="34" charset="-128"/>
-                </a:rPr>
-                <a:t>Busybox</a:t>
               </a:r>
               <a:endParaRPr kumimoji="0" lang="en-US" sz="1800" b="0" i="0" u="none" strike="noStrike" kern="0" cap="none" spc="0" normalizeH="0" baseline="0" dirty="0">
                 <a:ln>
@@ -27180,7 +27691,78 @@
       </p:grpSpPr>
       <p:sp>
         <p:nvSpPr>
-          <p:cNvPr id="3" name="Title 2"/>
+          <p:cNvPr id="2" name="Text Placeholder 1">
+            <a:extLst>
+              <a:ext uri="{FF2B5EF4-FFF2-40B4-BE49-F238E27FC236}">
+                <a16:creationId xmlns:a16="http://schemas.microsoft.com/office/drawing/2014/main" id="{A704EC08-AFC7-4D18-AC9A-F3343F45EF2A}"/>
+              </a:ext>
+            </a:extLst>
+          </p:cNvPr>
+          <p:cNvSpPr>
+            <a:spLocks noGrp="1"/>
+          </p:cNvSpPr>
+          <p:nvPr>
+            <p:ph type="body" sz="quarter" idx="10"/>
+          </p:nvPr>
+        </p:nvSpPr>
+        <p:spPr/>
+        <p:txBody>
+          <a:bodyPr/>
+          <a:lstStyle/>
+          <a:p>
+            <a:r>
+              <a:rPr lang="en-US" dirty="0">
+                <a:hlinkClick r:id="rId3"/>
+              </a:rPr>
+              <a:t>Docker Hub</a:t>
+            </a:r>
+            <a:endParaRPr lang="en-US" dirty="0"/>
+          </a:p>
+          <a:p>
+            <a:endParaRPr lang="en-US" dirty="0"/>
+          </a:p>
+        </p:txBody>
+      </p:sp>
+      <p:sp>
+        <p:nvSpPr>
+          <p:cNvPr id="3" name="Text Placeholder 2">
+            <a:extLst>
+              <a:ext uri="{FF2B5EF4-FFF2-40B4-BE49-F238E27FC236}">
+                <a16:creationId xmlns:a16="http://schemas.microsoft.com/office/drawing/2014/main" id="{166921B3-EF71-4E02-AB72-2F9FB0E76D4B}"/>
+              </a:ext>
+            </a:extLst>
+          </p:cNvPr>
+          <p:cNvSpPr>
+            <a:spLocks noGrp="1"/>
+          </p:cNvSpPr>
+          <p:nvPr>
+            <p:ph type="body" sz="quarter" idx="11"/>
+          </p:nvPr>
+        </p:nvSpPr>
+        <p:spPr/>
+        <p:txBody>
+          <a:bodyPr/>
+          <a:lstStyle/>
+          <a:p>
+            <a:r>
+              <a:rPr lang="en-US" dirty="0">
+                <a:hlinkClick r:id="rId4"/>
+              </a:rPr>
+              <a:t>JFrog Artifactory</a:t>
+            </a:r>
+            <a:endParaRPr lang="en-US" dirty="0"/>
+          </a:p>
+        </p:txBody>
+      </p:sp>
+      <p:sp>
+        <p:nvSpPr>
+          <p:cNvPr id="4" name="Title 3">
+            <a:extLst>
+              <a:ext uri="{FF2B5EF4-FFF2-40B4-BE49-F238E27FC236}">
+                <a16:creationId xmlns:a16="http://schemas.microsoft.com/office/drawing/2014/main" id="{A84BDB2E-39DF-4756-92FA-1F28834FBDBB}"/>
+              </a:ext>
+            </a:extLst>
+          </p:cNvPr>
           <p:cNvSpPr>
             <a:spLocks noGrp="1"/>
           </p:cNvSpPr>
@@ -27195,351 +27777,17 @@
           <a:p>
             <a:r>
               <a:rPr lang="en-US" dirty="0"/>
-              <a:t>Docker login credentials</a:t>
-            </a:r>
-          </a:p>
-        </p:txBody>
-      </p:sp>
-      <p:sp>
-        <p:nvSpPr>
-          <p:cNvPr id="4" name="Flowchart: Magnetic Disk 3"/>
-          <p:cNvSpPr/>
-          <p:nvPr/>
-        </p:nvSpPr>
-        <p:spPr bwMode="gray">
-          <a:xfrm>
-            <a:off x="772758" y="1927317"/>
-            <a:ext cx="2661557" cy="1665515"/>
-          </a:xfrm>
-          <a:prstGeom prst="flowChartMagneticDisk">
-            <a:avLst/>
-          </a:prstGeom>
-          <a:solidFill>
-            <a:schemeClr val="accent1"/>
-          </a:solidFill>
-          <a:ln w="6350" algn="ctr">
-            <a:solidFill>
-              <a:schemeClr val="accent1">
-                <a:lumMod val="20000"/>
-                <a:lumOff val="80000"/>
-              </a:schemeClr>
-            </a:solidFill>
-            <a:miter lim="800000"/>
-            <a:headEnd/>
-            <a:tailEnd/>
-          </a:ln>
-        </p:spPr>
-        <p:txBody>
-          <a:bodyPr lIns="90000" tIns="72000" rIns="90000" bIns="72000" rtlCol="0" anchor="ctr"/>
-          <a:lstStyle/>
-          <a:p>
-            <a:pPr marR="0" algn="ctr" defTabSz="914400" eaLnBrk="1" fontAlgn="base" latinLnBrk="0" hangingPunct="1">
-              <a:lnSpc>
-                <a:spcPct val="100000"/>
-              </a:lnSpc>
-              <a:spcBef>
-                <a:spcPct val="50000"/>
-              </a:spcBef>
-              <a:spcAft>
-                <a:spcPct val="0"/>
-              </a:spcAft>
-              <a:buClr>
-                <a:srgbClr val="F0AB00"/>
-              </a:buClr>
-              <a:buSzPct val="80000"/>
-              <a:tabLst/>
-            </a:pPr>
-            <a:r>
-              <a:rPr kumimoji="0" lang="en-US" sz="2000" b="1" i="0" u="none" strike="noStrike" kern="0" cap="none" spc="0" normalizeH="0" baseline="0" noProof="0" dirty="0">
-                <a:ln>
-                  <a:noFill/>
-                </a:ln>
-                <a:effectLst/>
-                <a:uLnTx/>
-                <a:uFillTx/>
-                <a:ea typeface="Arial Unicode MS" pitchFamily="34" charset="-128"/>
-                <a:cs typeface="Arial Unicode MS" pitchFamily="34" charset="-128"/>
-              </a:rPr>
-              <a:t>Private Registry</a:t>
-            </a:r>
-          </a:p>
-        </p:txBody>
-      </p:sp>
-      <p:cxnSp>
-        <p:nvCxnSpPr>
-          <p:cNvPr id="16" name="Straight Arrow Connector 15"/>
-          <p:cNvCxnSpPr>
-            <a:cxnSpLocks/>
-            <a:endCxn id="36" idx="1"/>
-          </p:cNvCxnSpPr>
-          <p:nvPr/>
-        </p:nvCxnSpPr>
-        <p:spPr>
-          <a:xfrm>
-            <a:off x="3434315" y="2760076"/>
-            <a:ext cx="1903746" cy="22339"/>
-          </a:xfrm>
-          <a:prstGeom prst="straightConnector1">
-            <a:avLst/>
-          </a:prstGeom>
-          <a:ln w="57150">
-            <a:solidFill>
-              <a:schemeClr val="accent1"/>
-            </a:solidFill>
-            <a:headEnd type="triangle" w="med" len="med"/>
-            <a:tailEnd type="triangle" w="med" len="med"/>
-          </a:ln>
-        </p:spPr>
-        <p:style>
-          <a:lnRef idx="1">
-            <a:schemeClr val="accent1"/>
-          </a:lnRef>
-          <a:fillRef idx="0">
-            <a:schemeClr val="accent1"/>
-          </a:fillRef>
-          <a:effectRef idx="0">
-            <a:schemeClr val="accent1"/>
-          </a:effectRef>
-          <a:fontRef idx="minor">
-            <a:schemeClr val="tx1"/>
-          </a:fontRef>
-        </p:style>
-      </p:cxnSp>
-      <p:sp>
-        <p:nvSpPr>
-          <p:cNvPr id="34" name="Rectangle: Rounded Corners 33"/>
-          <p:cNvSpPr/>
-          <p:nvPr/>
-        </p:nvSpPr>
-        <p:spPr bwMode="gray">
-          <a:xfrm>
-            <a:off x="8244097" y="3889271"/>
-            <a:ext cx="3448304" cy="1261311"/>
-          </a:xfrm>
-          <a:prstGeom prst="roundRect">
-            <a:avLst/>
-          </a:prstGeom>
-          <a:solidFill>
-            <a:schemeClr val="bg2"/>
-          </a:solidFill>
-          <a:ln w="28575">
-            <a:prstDash val="sysDash"/>
-            <a:headEnd/>
-            <a:tailEnd/>
-          </a:ln>
-        </p:spPr>
-        <p:style>
-          <a:lnRef idx="2">
-            <a:schemeClr val="accent2"/>
-          </a:lnRef>
-          <a:fillRef idx="1">
-            <a:schemeClr val="lt1"/>
-          </a:fillRef>
-          <a:effectRef idx="0">
-            <a:schemeClr val="accent2"/>
-          </a:effectRef>
-          <a:fontRef idx="minor">
-            <a:schemeClr val="dk1"/>
-          </a:fontRef>
-        </p:style>
-        <p:txBody>
-          <a:bodyPr lIns="90000" tIns="72000" rIns="90000" bIns="72000" rtlCol="0" anchor="ctr"/>
-          <a:lstStyle/>
-          <a:p>
-            <a:pPr marR="0" defTabSz="914400" eaLnBrk="1" fontAlgn="base" latinLnBrk="0" hangingPunct="1">
-              <a:lnSpc>
-                <a:spcPct val="100000"/>
-              </a:lnSpc>
-              <a:spcBef>
-                <a:spcPct val="50000"/>
-              </a:spcBef>
-              <a:spcAft>
-                <a:spcPct val="0"/>
-              </a:spcAft>
-              <a:buClr>
-                <a:srgbClr val="F0AB00"/>
-              </a:buClr>
-              <a:buSzPct val="80000"/>
-              <a:tabLst/>
-            </a:pPr>
-            <a:r>
-              <a:rPr lang="en-US" sz="1800" kern="0" dirty="0">
-                <a:ea typeface="Arial Unicode MS" pitchFamily="34" charset="-128"/>
-                <a:cs typeface="Arial Unicode MS" pitchFamily="34" charset="-128"/>
-              </a:rPr>
-              <a:t>docker login &lt;registry </a:t>
-            </a:r>
-            <a:r>
-              <a:rPr lang="en-US" sz="1800" kern="0" dirty="0" err="1">
-                <a:ea typeface="Arial Unicode MS" pitchFamily="34" charset="-128"/>
-                <a:cs typeface="Arial Unicode MS" pitchFamily="34" charset="-128"/>
-              </a:rPr>
-              <a:t>url</a:t>
-            </a:r>
-            <a:r>
-              <a:rPr lang="en-US" sz="1800" kern="0" dirty="0">
-                <a:ea typeface="Arial Unicode MS" pitchFamily="34" charset="-128"/>
-                <a:cs typeface="Arial Unicode MS" pitchFamily="34" charset="-128"/>
-              </a:rPr>
-              <a:t>&gt; </a:t>
-            </a:r>
-          </a:p>
-          <a:p>
-            <a:pPr marR="0" defTabSz="914400" eaLnBrk="1" fontAlgn="base" latinLnBrk="0" hangingPunct="1">
-              <a:lnSpc>
-                <a:spcPct val="100000"/>
-              </a:lnSpc>
-              <a:spcBef>
-                <a:spcPts val="600"/>
-              </a:spcBef>
-              <a:spcAft>
-                <a:spcPct val="0"/>
-              </a:spcAft>
-              <a:buClr>
-                <a:srgbClr val="F0AB00"/>
-              </a:buClr>
-              <a:buSzPct val="80000"/>
-              <a:tabLst/>
-            </a:pPr>
-            <a:r>
-              <a:rPr lang="en-US" sz="1800" kern="0" dirty="0">
-                <a:ea typeface="Arial Unicode MS" pitchFamily="34" charset="-128"/>
-                <a:cs typeface="Arial Unicode MS" pitchFamily="34" charset="-128"/>
-              </a:rPr>
-              <a:t>-u &lt;username&gt;</a:t>
-            </a:r>
-          </a:p>
-          <a:p>
-            <a:pPr marR="0" defTabSz="914400" eaLnBrk="1" fontAlgn="base" latinLnBrk="0" hangingPunct="1">
-              <a:lnSpc>
-                <a:spcPct val="100000"/>
-              </a:lnSpc>
-              <a:spcBef>
-                <a:spcPts val="600"/>
-              </a:spcBef>
-              <a:spcAft>
-                <a:spcPct val="0"/>
-              </a:spcAft>
-              <a:buClr>
-                <a:srgbClr val="F0AB00"/>
-              </a:buClr>
-              <a:buSzPct val="80000"/>
-              <a:tabLst/>
-            </a:pPr>
-            <a:r>
-              <a:rPr lang="en-US" sz="1800" kern="0" dirty="0">
-                <a:ea typeface="Arial Unicode MS" pitchFamily="34" charset="-128"/>
-                <a:cs typeface="Arial Unicode MS" pitchFamily="34" charset="-128"/>
-              </a:rPr>
-              <a:t>-p &lt;password&gt;</a:t>
-            </a:r>
-            <a:endParaRPr kumimoji="0" lang="en-US" sz="1800" b="0" i="0" u="none" strike="noStrike" kern="0" cap="none" spc="0" normalizeH="0" baseline="0" noProof="0" dirty="0" err="1">
-              <a:ln>
-                <a:noFill/>
-              </a:ln>
-              <a:effectLst/>
-              <a:uLnTx/>
-              <a:uFillTx/>
-              <a:ea typeface="Arial Unicode MS" pitchFamily="34" charset="-128"/>
-              <a:cs typeface="Arial Unicode MS" pitchFamily="34" charset="-128"/>
-            </a:endParaRPr>
+              <a:t>Registries for images</a:t>
+            </a:r>
           </a:p>
         </p:txBody>
       </p:sp>
       <p:pic>
         <p:nvPicPr>
-          <p:cNvPr id="29" name="Picture 28"/>
-          <p:cNvPicPr>
-            <a:picLocks noChangeAspect="1"/>
-          </p:cNvPicPr>
-          <p:nvPr/>
-        </p:nvPicPr>
-        <p:blipFill>
-          <a:blip r:embed="rId3"/>
-          <a:stretch>
-            <a:fillRect/>
-          </a:stretch>
-        </p:blipFill>
-        <p:spPr>
-          <a:xfrm rot="4927815" flipH="1">
-            <a:off x="10396613" y="4160567"/>
-            <a:ext cx="1378156" cy="1378156"/>
-          </a:xfrm>
-          <a:prstGeom prst="rect">
-            <a:avLst/>
-          </a:prstGeom>
-        </p:spPr>
-      </p:pic>
-      <p:sp>
-        <p:nvSpPr>
-          <p:cNvPr id="36" name="Rectangle 35"/>
-          <p:cNvSpPr/>
-          <p:nvPr/>
-        </p:nvSpPr>
-        <p:spPr bwMode="gray">
-          <a:xfrm>
-            <a:off x="5338061" y="2135830"/>
-            <a:ext cx="2414107" cy="1293169"/>
-          </a:xfrm>
-          <a:prstGeom prst="rect">
-            <a:avLst/>
-          </a:prstGeom>
-          <a:solidFill>
-            <a:schemeClr val="accent3">
-              <a:lumMod val="50000"/>
-            </a:schemeClr>
-          </a:solidFill>
-          <a:ln w="6350" algn="ctr">
-            <a:solidFill>
-              <a:schemeClr val="tx1"/>
-            </a:solidFill>
-            <a:miter lim="800000"/>
-            <a:headEnd/>
-            <a:tailEnd/>
-          </a:ln>
-        </p:spPr>
-        <p:txBody>
-          <a:bodyPr vert="horz" lIns="90000" tIns="72000" rIns="90000" bIns="72000" rtlCol="0" anchor="ctr"/>
-          <a:lstStyle/>
-          <a:p>
-            <a:pPr algn="ctr" defTabSz="914400" fontAlgn="base">
-              <a:spcBef>
-                <a:spcPct val="50000"/>
-              </a:spcBef>
-              <a:spcAft>
-                <a:spcPct val="0"/>
-              </a:spcAft>
-              <a:buClr>
-                <a:srgbClr val="F0AB00"/>
-              </a:buClr>
-              <a:buSzPct val="80000"/>
-            </a:pPr>
-            <a:r>
-              <a:rPr lang="en-US" sz="1600" kern="0">
-                <a:solidFill>
-                  <a:schemeClr val="bg1"/>
-                </a:solidFill>
-                <a:latin typeface="Arial"/>
-                <a:ea typeface="Arial Unicode MS" pitchFamily="34" charset="-128"/>
-              </a:rPr>
-              <a:t>dockerd</a:t>
-            </a:r>
-            <a:endParaRPr lang="en-US" sz="1600" kern="0" dirty="0">
-              <a:solidFill>
-                <a:schemeClr val="bg1"/>
-              </a:solidFill>
-              <a:latin typeface="Arial"/>
-              <a:ea typeface="Arial Unicode MS" pitchFamily="34" charset="-128"/>
-            </a:endParaRPr>
-          </a:p>
-        </p:txBody>
-      </p:sp>
-      <p:pic>
-        <p:nvPicPr>
-          <p:cNvPr id="11" name="Picture 10">
+          <p:cNvPr id="5" name="Picture 4">
             <a:extLst>
               <a:ext uri="{FF2B5EF4-FFF2-40B4-BE49-F238E27FC236}">
-                <a16:creationId xmlns:a16="http://schemas.microsoft.com/office/drawing/2014/main" id="{8687B53D-D62B-41B5-9DDD-8963C6188C03}"/>
+                <a16:creationId xmlns:a16="http://schemas.microsoft.com/office/drawing/2014/main" id="{D9249236-3754-4D21-806B-FDC6E2E942BD}"/>
               </a:ext>
             </a:extLst>
           </p:cNvPr>
@@ -27549,144 +27797,27 @@
           <p:nvPr/>
         </p:nvPicPr>
         <p:blipFill>
-          <a:blip r:embed="rId4"/>
+          <a:blip r:embed="rId5"/>
           <a:stretch>
             <a:fillRect/>
           </a:stretch>
         </p:blipFill>
         <p:spPr>
           <a:xfrm>
-            <a:off x="3136565" y="2705828"/>
-            <a:ext cx="1774008" cy="1774008"/>
+            <a:off x="708640" y="2217755"/>
+            <a:ext cx="4586374" cy="3277367"/>
           </a:xfrm>
           <a:prstGeom prst="rect">
             <a:avLst/>
           </a:prstGeom>
         </p:spPr>
       </p:pic>
-      <p:sp>
-        <p:nvSpPr>
-          <p:cNvPr id="2" name="Rectangle 1">
+      <p:pic>
+        <p:nvPicPr>
+          <p:cNvPr id="6" name="Picture 5">
             <a:extLst>
               <a:ext uri="{FF2B5EF4-FFF2-40B4-BE49-F238E27FC236}">
-                <a16:creationId xmlns:a16="http://schemas.microsoft.com/office/drawing/2014/main" id="{25F2868B-D6D2-4C76-B481-6486923ADA06}"/>
-              </a:ext>
-            </a:extLst>
-          </p:cNvPr>
-          <p:cNvSpPr/>
-          <p:nvPr/>
-        </p:nvSpPr>
-        <p:spPr bwMode="gray">
-          <a:xfrm>
-            <a:off x="907136" y="4406148"/>
-            <a:ext cx="2392799" cy="886995"/>
-          </a:xfrm>
-          <a:prstGeom prst="rect">
-            <a:avLst/>
-          </a:prstGeom>
-          <a:solidFill>
-            <a:schemeClr val="accent1"/>
-          </a:solidFill>
-          <a:ln w="6350" algn="ctr">
-            <a:solidFill>
-              <a:schemeClr val="accent1">
-                <a:lumMod val="20000"/>
-                <a:lumOff val="80000"/>
-              </a:schemeClr>
-            </a:solidFill>
-            <a:miter lim="800000"/>
-            <a:headEnd/>
-            <a:tailEnd/>
-          </a:ln>
-        </p:spPr>
-        <p:txBody>
-          <a:bodyPr lIns="90000" tIns="72000" rIns="90000" bIns="72000" rtlCol="0" anchor="ctr"/>
-          <a:lstStyle/>
-          <a:p>
-            <a:pPr marR="0" algn="ctr" defTabSz="914400" eaLnBrk="1" fontAlgn="base" latinLnBrk="0" hangingPunct="1">
-              <a:lnSpc>
-                <a:spcPct val="100000"/>
-              </a:lnSpc>
-              <a:spcBef>
-                <a:spcPct val="50000"/>
-              </a:spcBef>
-              <a:spcAft>
-                <a:spcPct val="0"/>
-              </a:spcAft>
-              <a:buClr>
-                <a:srgbClr val="F0AB00"/>
-              </a:buClr>
-              <a:buSzPct val="80000"/>
-              <a:tabLst/>
-            </a:pPr>
-            <a:r>
-              <a:rPr kumimoji="0" lang="en-US" sz="1800" b="0" i="0" u="none" strike="noStrike" kern="0" cap="none" spc="0" normalizeH="0" baseline="0" noProof="0" dirty="0">
-                <a:ln>
-                  <a:noFill/>
-                </a:ln>
-                <a:effectLst/>
-                <a:uLnTx/>
-                <a:uFillTx/>
-                <a:ea typeface="Arial Unicode MS" pitchFamily="34" charset="-128"/>
-                <a:cs typeface="Arial Unicode MS" pitchFamily="34" charset="-128"/>
-              </a:rPr>
-              <a:t>User Management</a:t>
-            </a:r>
-          </a:p>
-        </p:txBody>
-      </p:sp>
-      <p:cxnSp>
-        <p:nvCxnSpPr>
-          <p:cNvPr id="6" name="Connector: Elbow 5">
-            <a:extLst>
-              <a:ext uri="{FF2B5EF4-FFF2-40B4-BE49-F238E27FC236}">
-                <a16:creationId xmlns:a16="http://schemas.microsoft.com/office/drawing/2014/main" id="{288D0C73-804E-414D-BC04-D6E95E9221F5}"/>
-              </a:ext>
-            </a:extLst>
-          </p:cNvPr>
-          <p:cNvCxnSpPr>
-            <a:stCxn id="2" idx="3"/>
-            <a:endCxn id="11" idx="2"/>
-          </p:cNvCxnSpPr>
-          <p:nvPr/>
-        </p:nvCxnSpPr>
-        <p:spPr>
-          <a:xfrm flipV="1">
-            <a:off x="3299935" y="4479836"/>
-            <a:ext cx="723634" cy="369810"/>
-          </a:xfrm>
-          <a:prstGeom prst="bentConnector2">
-            <a:avLst/>
-          </a:prstGeom>
-          <a:ln w="57150">
-            <a:solidFill>
-              <a:schemeClr val="accent1"/>
-            </a:solidFill>
-            <a:headEnd type="none" w="med" len="med"/>
-            <a:tailEnd type="triangle" w="med" len="med"/>
-          </a:ln>
-        </p:spPr>
-        <p:style>
-          <a:lnRef idx="1">
-            <a:schemeClr val="accent1"/>
-          </a:lnRef>
-          <a:fillRef idx="0">
-            <a:schemeClr val="accent1"/>
-          </a:fillRef>
-          <a:effectRef idx="0">
-            <a:schemeClr val="accent1"/>
-          </a:effectRef>
-          <a:fontRef idx="minor">
-            <a:schemeClr val="tx1"/>
-          </a:fontRef>
-        </p:style>
-      </p:cxnSp>
-      <p:pic>
-        <p:nvPicPr>
-          <p:cNvPr id="10" name="Graphic 9" descr="Document">
-            <a:extLst>
-              <a:ext uri="{FF2B5EF4-FFF2-40B4-BE49-F238E27FC236}">
-                <a16:creationId xmlns:a16="http://schemas.microsoft.com/office/drawing/2014/main" id="{6186E8BD-E751-4DAD-9E48-80FF3D8B0E39}"/>
+                <a16:creationId xmlns:a16="http://schemas.microsoft.com/office/drawing/2014/main" id="{3F11DC76-4D9B-46B1-988C-6FA608C8F257}"/>
               </a:ext>
             </a:extLst>
           </p:cNvPr>
@@ -27696,242 +27827,25 @@
           <p:nvPr/>
         </p:nvPicPr>
         <p:blipFill>
-          <a:blip r:embed="rId5">
-            <a:extLst>
-              <a:ext uri="{96DAC541-7B7A-43D3-8B79-37D633B846F1}">
-                <asvg:svgBlip xmlns:asvg="http://schemas.microsoft.com/office/drawing/2016/SVG/main" r:embed="rId6"/>
-              </a:ext>
-            </a:extLst>
-          </a:blip>
+          <a:blip r:embed="rId6"/>
           <a:stretch>
             <a:fillRect/>
           </a:stretch>
         </p:blipFill>
         <p:spPr>
           <a:xfrm>
-            <a:off x="5666796" y="4077990"/>
-            <a:ext cx="914400" cy="914400"/>
+            <a:off x="6430795" y="2218854"/>
+            <a:ext cx="5259682" cy="3276268"/>
           </a:xfrm>
           <a:prstGeom prst="rect">
             <a:avLst/>
           </a:prstGeom>
         </p:spPr>
       </p:pic>
-      <p:sp>
-        <p:nvSpPr>
-          <p:cNvPr id="12" name="TextBox 11">
-            <a:extLst>
-              <a:ext uri="{FF2B5EF4-FFF2-40B4-BE49-F238E27FC236}">
-                <a16:creationId xmlns:a16="http://schemas.microsoft.com/office/drawing/2014/main" id="{CDAF12C8-7ECC-46AC-A508-C52FC8A5C963}"/>
-              </a:ext>
-            </a:extLst>
-          </p:cNvPr>
-          <p:cNvSpPr txBox="1"/>
-          <p:nvPr/>
-        </p:nvSpPr>
-        <p:spPr>
-          <a:xfrm>
-            <a:off x="5471556" y="4992390"/>
-            <a:ext cx="1304880" cy="276999"/>
-          </a:xfrm>
-          <a:prstGeom prst="rect">
-            <a:avLst/>
-          </a:prstGeom>
-          <a:noFill/>
-        </p:spPr>
-        <p:txBody>
-          <a:bodyPr wrap="square" lIns="0" tIns="0" rIns="0" bIns="0" rtlCol="0">
-            <a:spAutoFit/>
-          </a:bodyPr>
-          <a:lstStyle/>
-          <a:p>
-            <a:pPr algn="ctr" fontAlgn="base">
-              <a:spcBef>
-                <a:spcPct val="50000"/>
-              </a:spcBef>
-              <a:spcAft>
-                <a:spcPct val="0"/>
-              </a:spcAft>
-              <a:buClr>
-                <a:srgbClr val="F0AB00"/>
-              </a:buClr>
-              <a:buSzPct val="80000"/>
-            </a:pPr>
-            <a:r>
-              <a:rPr lang="en-US" sz="1800" kern="0" dirty="0" err="1">
-                <a:solidFill>
-                  <a:schemeClr val="accent6">
-                    <a:lumMod val="50000"/>
-                  </a:schemeClr>
-                </a:solidFill>
-                <a:ea typeface="Arial Unicode MS" pitchFamily="34" charset="-128"/>
-                <a:cs typeface="Arial Unicode MS" pitchFamily="34" charset="-128"/>
-              </a:rPr>
-              <a:t>config.json</a:t>
-            </a:r>
-            <a:endParaRPr lang="en-US" sz="1800" kern="0" dirty="0">
-              <a:solidFill>
-                <a:schemeClr val="accent6">
-                  <a:lumMod val="50000"/>
-                </a:schemeClr>
-              </a:solidFill>
-              <a:ea typeface="Arial Unicode MS" pitchFamily="34" charset="-128"/>
-              <a:cs typeface="Arial Unicode MS" pitchFamily="34" charset="-128"/>
-            </a:endParaRPr>
-          </a:p>
-        </p:txBody>
-      </p:sp>
-      <p:cxnSp>
-        <p:nvCxnSpPr>
-          <p:cNvPr id="19" name="Straight Arrow Connector 18">
-            <a:extLst>
-              <a:ext uri="{FF2B5EF4-FFF2-40B4-BE49-F238E27FC236}">
-                <a16:creationId xmlns:a16="http://schemas.microsoft.com/office/drawing/2014/main" id="{13F24729-9B15-43FE-A91E-794CF2F681AE}"/>
-              </a:ext>
-            </a:extLst>
-          </p:cNvPr>
-          <p:cNvCxnSpPr>
-            <a:cxnSpLocks/>
-            <a:stCxn id="10" idx="0"/>
-          </p:cNvCxnSpPr>
-          <p:nvPr/>
-        </p:nvCxnSpPr>
-        <p:spPr>
-          <a:xfrm flipV="1">
-            <a:off x="6123996" y="3429000"/>
-            <a:ext cx="0" cy="648990"/>
-          </a:xfrm>
-          <a:prstGeom prst="straightConnector1">
-            <a:avLst/>
-          </a:prstGeom>
-          <a:ln w="57150">
-            <a:solidFill>
-              <a:schemeClr val="accent6">
-                <a:lumMod val="50000"/>
-              </a:schemeClr>
-            </a:solidFill>
-            <a:headEnd type="none" w="med" len="med"/>
-            <a:tailEnd type="triangle" w="med" len="med"/>
-          </a:ln>
-        </p:spPr>
-        <p:style>
-          <a:lnRef idx="1">
-            <a:schemeClr val="accent1"/>
-          </a:lnRef>
-          <a:fillRef idx="0">
-            <a:schemeClr val="accent1"/>
-          </a:fillRef>
-          <a:effectRef idx="0">
-            <a:schemeClr val="accent1"/>
-          </a:effectRef>
-          <a:fontRef idx="minor">
-            <a:schemeClr val="tx1"/>
-          </a:fontRef>
-        </p:style>
-      </p:cxnSp>
-      <p:pic>
-        <p:nvPicPr>
-          <p:cNvPr id="22" name="Graphic 21" descr="Laptop">
-            <a:extLst>
-              <a:ext uri="{FF2B5EF4-FFF2-40B4-BE49-F238E27FC236}">
-                <a16:creationId xmlns:a16="http://schemas.microsoft.com/office/drawing/2014/main" id="{4706E33B-D950-4CFE-AED0-70E8D0ADABC7}"/>
-              </a:ext>
-            </a:extLst>
-          </p:cNvPr>
-          <p:cNvPicPr>
-            <a:picLocks noChangeAspect="1"/>
-          </p:cNvPicPr>
-          <p:nvPr/>
-        </p:nvPicPr>
-        <p:blipFill>
-          <a:blip r:embed="rId7">
-            <a:extLst>
-              <a:ext uri="{96DAC541-7B7A-43D3-8B79-37D633B846F1}">
-                <asvg:svgBlip xmlns:asvg="http://schemas.microsoft.com/office/drawing/2016/SVG/main" r:embed="rId8"/>
-              </a:ext>
-            </a:extLst>
-          </a:blip>
-          <a:stretch>
-            <a:fillRect/>
-          </a:stretch>
-        </p:blipFill>
-        <p:spPr>
-          <a:xfrm>
-            <a:off x="9219829" y="2535845"/>
-            <a:ext cx="1542145" cy="1542145"/>
-          </a:xfrm>
-          <a:prstGeom prst="rect">
-            <a:avLst/>
-          </a:prstGeom>
-        </p:spPr>
-      </p:pic>
-      <p:sp>
-        <p:nvSpPr>
-          <p:cNvPr id="23" name="Arrow: Chevron 22">
-            <a:extLst>
-              <a:ext uri="{FF2B5EF4-FFF2-40B4-BE49-F238E27FC236}">
-                <a16:creationId xmlns:a16="http://schemas.microsoft.com/office/drawing/2014/main" id="{21A6C290-3016-47F6-A96A-336589ACAF5F}"/>
-              </a:ext>
-            </a:extLst>
-          </p:cNvPr>
-          <p:cNvSpPr/>
-          <p:nvPr/>
-        </p:nvSpPr>
-        <p:spPr bwMode="gray">
-          <a:xfrm rot="10800000">
-            <a:off x="6776436" y="4313441"/>
-            <a:ext cx="1242096" cy="443498"/>
-          </a:xfrm>
-          <a:prstGeom prst="chevron">
-            <a:avLst/>
-          </a:prstGeom>
-          <a:solidFill>
-            <a:schemeClr val="tx1"/>
-          </a:solidFill>
-          <a:ln w="6350" algn="ctr">
-            <a:noFill/>
-            <a:miter lim="800000"/>
-            <a:headEnd/>
-            <a:tailEnd/>
-          </a:ln>
-        </p:spPr>
-        <p:txBody>
-          <a:bodyPr lIns="90000" tIns="72000" rIns="90000" bIns="72000" rtlCol="0" anchor="ctr"/>
-          <a:lstStyle/>
-          <a:p>
-            <a:pPr marR="0" algn="ctr" defTabSz="914400" eaLnBrk="1" fontAlgn="base" latinLnBrk="0" hangingPunct="1">
-              <a:lnSpc>
-                <a:spcPct val="100000"/>
-              </a:lnSpc>
-              <a:spcBef>
-                <a:spcPct val="50000"/>
-              </a:spcBef>
-              <a:spcAft>
-                <a:spcPct val="0"/>
-              </a:spcAft>
-              <a:buClr>
-                <a:srgbClr val="F0AB00"/>
-              </a:buClr>
-              <a:buSzPct val="80000"/>
-              <a:tabLst/>
-            </a:pPr>
-            <a:endParaRPr kumimoji="0" lang="en-US" sz="1800" b="0" i="0" u="none" strike="noStrike" kern="0" cap="none" spc="0" normalizeH="0" baseline="0" noProof="0" dirty="0" err="1">
-              <a:ln>
-                <a:noFill/>
-              </a:ln>
-              <a:effectLst/>
-              <a:uLnTx/>
-              <a:uFillTx/>
-              <a:ea typeface="Arial Unicode MS" pitchFamily="34" charset="-128"/>
-              <a:cs typeface="Arial Unicode MS" pitchFamily="34" charset="-128"/>
-            </a:endParaRPr>
-          </a:p>
-        </p:txBody>
-      </p:sp>
     </p:spTree>
     <p:extLst>
       <p:ext uri="{BB962C8B-B14F-4D97-AF65-F5344CB8AC3E}">
-        <p14:creationId xmlns:p14="http://schemas.microsoft.com/office/powerpoint/2010/main" val="4129837522"/>
+        <p14:creationId xmlns:p14="http://schemas.microsoft.com/office/powerpoint/2010/main" val="2436238159"/>
       </p:ext>
     </p:extLst>
   </p:cSld>
